--- a/SDC/教学资料/课件/T5-软件设计、重构与系统演化（一）.pptx
+++ b/SDC/教学资料/课件/T5-软件设计、重构与系统演化（一）.pptx
@@ -4856,7 +4856,7 @@
           </a:p>
           <a:p>
             <a:r>
-              <a:t>权衡：消除的是按算法类型写的条件分支（坏味道“按类型分支”）。流程稳定，选择规则集中在一处。概念来自 2024 第 7-2 讲：多种打折方案，每次只应用一种。真实代码留到下一节的优惠券范围，不在这里展开。右侧结构图依 Gamma 等《设计模式》，2024 第 7-2 讲第 8 页用的是同一张图。</a:t>
+              <a:t>权衡：消除的是按算法类型写的条件分支（坏味道“按类型分支”；坏味道指让代码难改的结构，第 26 页展开）。流程稳定，选择规则集中在一处。概念来自 2024 第 7-2 讲：多种打折方案，每次只应用一种。真实代码留到下一节的优惠券范围，不在这里展开。右侧结构图依 Gamma 等《设计模式》，2024 第 7-2 讲第 8 页用的是同一张图。</a:t>
             </a:r>
           </a:p>
         </p:txBody>
@@ -22300,7 +22300,7 @@
                 <a:latin typeface="微软雅黑"/>
                 <a:ea typeface="微软雅黑"/>
               </a:rPr>
-              <a:t>本讲：设计过程、效果、坏味道、原则判定</a:t>
+              <a:t>本讲：设计过程、原则判定、效果、坏味道</a:t>
             </a:r>
             <a:endParaRPr lang="zh-CN" sz="2600">
               <a:latin typeface="微软雅黑"/>

--- a/SDC/教学资料/课件/T5-软件设计、重构与系统演化（一）.pptx
+++ b/SDC/教学资料/课件/T5-软件设计、重构与系统演化（一）.pptx
@@ -1724,6 +1724,11 @@
               <a:t>权衡：现在三种范围互不重叠，顺序不影响结果。以后若重叠，要先改这条查找，不能只加类。</a:t>
             </a:r>
           </a:p>
+          <a:p>
+            <a:r>
+              <a:t>取舍：可选——时间不足时略去，不影响本课重点、后续理解与作业。</a:t>
+            </a:r>
+          </a:p>
         </p:txBody>
       </p:sp>
       <p:sp>
@@ -3873,6 +3878,11 @@
               <a:t>权衡：消除的是重复的处理流程（坏味道“重复代码”）。和策略比：模板方法用继承固定流程，策略用组合替换算法。右侧结构图依 Gamma 等《设计模式》。</a:t>
             </a:r>
           </a:p>
+          <a:p>
+            <a:r>
+              <a:t>取舍：可选——时间不足时略去，不影响本课重点、后续理解与作业。</a:t>
+            </a:r>
+          </a:p>
         </p:txBody>
       </p:sp>
       <p:sp>
@@ -3980,6 +3990,11 @@
               <a:t>权衡：消除的是按状态写的密集条件分支。状态少且几乎不变时，一个分支更直白。右侧结构图依 Gamma 等《设计模式》；与策略的图形相同，区别在由谁、何时换掉当前对象。</a:t>
             </a:r>
           </a:p>
+          <a:p>
+            <a:r>
+              <a:t>取舍：可选——时间不足时略去，不影响本课重点、后续理解与作业。</a:t>
+            </a:r>
+          </a:p>
         </p:txBody>
       </p:sp>
       <p:sp>
@@ -4503,6 +4518,11 @@
               <a:t>权衡：下一页的内聚与耦合，就是判断分得对不对的两把尺子。</a:t>
             </a:r>
           </a:p>
+          <a:p>
+            <a:r>
+              <a:t>取舍：可选——时间不足时略去，不影响本课重点、后续理解与作业。</a:t>
+            </a:r>
+          </a:p>
         </p:txBody>
       </p:sp>
       <p:sp>
@@ -4952,6 +4972,11 @@
           <a:p>
             <a:r>
               <a:t>权衡：消除的是为功能组合派生的大量子类，Gamma 等把它列为装饰的动机；这不在 Fowler 的坏味道清单里。组合数上去了也不必为每种搭配建一个子类。材料是 2024 第 7-3 讲第 21–24 页：先有一种折扣，再叠加另一种。右侧结构图依 Gamma 等《设计模式》，2024 第 7-3 讲第 17 页用的是同一张图；装饰持有构件，用菱形表示。</a:t>
+            </a:r>
+          </a:p>
+          <a:p>
+            <a:r>
+              <a:t>取舍：可选——时间不足时略去，不影响本课重点、后续理解与作业。</a:t>
             </a:r>
           </a:p>
         </p:txBody>
